--- a/Web/Aliyun-Notes.pptx
+++ b/Web/Aliyun-Notes.pptx
@@ -5,18 +5,19 @@
     <p:sldMasterId id="2147483648" r:id="rId1"/>
   </p:sldMasterIdLst>
   <p:notesMasterIdLst>
-    <p:notesMasterId r:id="rId12"/>
+    <p:notesMasterId r:id="rId13"/>
   </p:notesMasterIdLst>
   <p:sldIdLst>
     <p:sldId id="256" r:id="rId3"/>
     <p:sldId id="262" r:id="rId4"/>
     <p:sldId id="266" r:id="rId5"/>
     <p:sldId id="263" r:id="rId6"/>
-    <p:sldId id="268" r:id="rId7"/>
-    <p:sldId id="261" r:id="rId8"/>
-    <p:sldId id="264" r:id="rId9"/>
-    <p:sldId id="267" r:id="rId10"/>
-    <p:sldId id="269" r:id="rId11"/>
+    <p:sldId id="270" r:id="rId7"/>
+    <p:sldId id="268" r:id="rId8"/>
+    <p:sldId id="261" r:id="rId9"/>
+    <p:sldId id="264" r:id="rId10"/>
+    <p:sldId id="267" r:id="rId11"/>
+    <p:sldId id="269" r:id="rId12"/>
   </p:sldIdLst>
   <p:sldSz cx="12192000" cy="6858000"/>
   <p:notesSz cx="6858000" cy="9144000"/>
@@ -3511,6 +3512,234 @@
 </p:sld>
 </file>
 
+<file path=ppt/slides/slide10.xml><?xml version="1.0" encoding="utf-8"?>
+<p:sld xmlns:a="http://schemas.openxmlformats.org/drawingml/2006/main" xmlns:r="http://schemas.openxmlformats.org/officeDocument/2006/relationships" xmlns:p="http://schemas.openxmlformats.org/presentationml/2006/main">
+  <p:cSld>
+    <p:spTree>
+      <p:nvGrpSpPr>
+        <p:cNvPr id="1" name=""/>
+        <p:cNvGrpSpPr/>
+        <p:nvPr/>
+      </p:nvGrpSpPr>
+      <p:grpSpPr/>
+      <p:sp>
+        <p:nvSpPr>
+          <p:cNvPr id="2" name="标题 1"/>
+          <p:cNvSpPr>
+            <a:spLocks noGrp="1"/>
+          </p:cNvSpPr>
+          <p:nvPr>
+            <p:ph type="title"/>
+          </p:nvPr>
+        </p:nvSpPr>
+        <p:spPr/>
+        <p:txBody>
+          <a:bodyPr/>
+          <a:p>
+            <a:r>
+              <a:rPr lang="en-US" altLang="zh-CN"/>
+              <a:t>Classes</a:t>
+            </a:r>
+            <a:endParaRPr lang="en-US" altLang="zh-CN"/>
+          </a:p>
+        </p:txBody>
+      </p:sp>
+      <p:sp>
+        <p:nvSpPr>
+          <p:cNvPr id="8" name="圆角矩形 7"/>
+          <p:cNvSpPr/>
+          <p:nvPr/>
+        </p:nvSpPr>
+        <p:spPr>
+          <a:xfrm>
+            <a:off x="950595" y="1593215"/>
+            <a:ext cx="5022850" cy="1388110"/>
+          </a:xfrm>
+          <a:prstGeom prst="roundRect">
+            <a:avLst/>
+          </a:prstGeom>
+        </p:spPr>
+        <p:style>
+          <a:lnRef idx="2">
+            <a:schemeClr val="accent1">
+              <a:shade val="50000"/>
+            </a:schemeClr>
+          </a:lnRef>
+          <a:fillRef idx="1">
+            <a:schemeClr val="accent1"/>
+          </a:fillRef>
+          <a:effectRef idx="0">
+            <a:schemeClr val="accent1"/>
+          </a:effectRef>
+          <a:fontRef idx="minor">
+            <a:schemeClr val="lt1"/>
+          </a:fontRef>
+        </p:style>
+        <p:txBody>
+          <a:bodyPr rtlCol="0" anchor="t" anchorCtr="0"/>
+          <a:p>
+            <a:pPr algn="ctr"/>
+            <a:r>
+              <a:rPr lang="en-US" altLang="zh-CN"/>
+              <a:t>ACSClient</a:t>
+            </a:r>
+            <a:endParaRPr lang="en-US" altLang="zh-CN"/>
+          </a:p>
+          <a:p>
+            <a:pPr marL="285750" indent="-285750" algn="l">
+              <a:buFont typeface="Arial" panose="020B0604020202020204" pitchFamily="34" charset="0"/>
+              <a:buChar char="•"/>
+            </a:pPr>
+            <a:r>
+              <a:rPr lang="en-US" altLang="zh-CN"/>
+              <a:t>ACSClient('accessKeyId', 'accessSecret', 'cn-beijing')</a:t>
+            </a:r>
+            <a:endParaRPr lang="en-US" altLang="zh-CN"/>
+          </a:p>
+          <a:p>
+            <a:pPr marL="285750" indent="-285750" algn="l">
+              <a:buFont typeface="Arial" panose="020B0604020202020204" pitchFamily="34" charset="0"/>
+              <a:buChar char="•"/>
+            </a:pPr>
+            <a:r>
+              <a:rPr lang="en-US" altLang="zh-CN"/>
+              <a:t>do_action(request)	// return response</a:t>
+            </a:r>
+            <a:endParaRPr lang="en-US" altLang="zh-CN"/>
+          </a:p>
+        </p:txBody>
+      </p:sp>
+      <p:sp>
+        <p:nvSpPr>
+          <p:cNvPr id="6" name="圆角矩形 5"/>
+          <p:cNvSpPr/>
+          <p:nvPr/>
+        </p:nvSpPr>
+        <p:spPr>
+          <a:xfrm>
+            <a:off x="6188710" y="1593215"/>
+            <a:ext cx="5165090" cy="2692400"/>
+          </a:xfrm>
+          <a:prstGeom prst="roundRect">
+            <a:avLst/>
+          </a:prstGeom>
+        </p:spPr>
+        <p:style>
+          <a:lnRef idx="2">
+            <a:schemeClr val="accent1">
+              <a:shade val="50000"/>
+            </a:schemeClr>
+          </a:lnRef>
+          <a:fillRef idx="1">
+            <a:schemeClr val="accent1"/>
+          </a:fillRef>
+          <a:effectRef idx="0">
+            <a:schemeClr val="accent1"/>
+          </a:effectRef>
+          <a:fontRef idx="minor">
+            <a:schemeClr val="lt1"/>
+          </a:fontRef>
+        </p:style>
+        <p:txBody>
+          <a:bodyPr rtlCol="0" anchor="t" anchorCtr="0"/>
+          <a:p>
+            <a:pPr algn="ctr"/>
+            <a:r>
+              <a:rPr lang="en-US" altLang="zh-CN"/>
+              <a:t>CommonRequest</a:t>
+            </a:r>
+            <a:endParaRPr lang="en-US" altLang="zh-CN"/>
+          </a:p>
+          <a:p>
+            <a:pPr marL="285750" indent="-285750" algn="l">
+              <a:buFont typeface="Arial" panose="020B0604020202020204" pitchFamily="34" charset="0"/>
+              <a:buChar char="•"/>
+            </a:pPr>
+            <a:r>
+              <a:rPr lang="en-US" altLang="zh-CN"/>
+              <a:t>set_accept_format('json')</a:t>
+            </a:r>
+            <a:endParaRPr lang="en-US" altLang="zh-CN"/>
+          </a:p>
+          <a:p>
+            <a:pPr marL="285750" indent="-285750" algn="l">
+              <a:buFont typeface="Arial" panose="020B0604020202020204" pitchFamily="34" charset="0"/>
+              <a:buChar char="•"/>
+            </a:pPr>
+            <a:r>
+              <a:rPr lang="en-US" altLang="zh-CN"/>
+              <a:t>set_domain('dysmsapi.aliyuncs.com')</a:t>
+            </a:r>
+            <a:endParaRPr lang="en-US" altLang="zh-CN"/>
+          </a:p>
+          <a:p>
+            <a:pPr marL="285750" indent="-285750" algn="l">
+              <a:buFont typeface="Arial" panose="020B0604020202020204" pitchFamily="34" charset="0"/>
+              <a:buChar char="•"/>
+            </a:pPr>
+            <a:r>
+              <a:rPr lang="en-US" altLang="zh-CN"/>
+              <a:t>set_method('POST')</a:t>
+            </a:r>
+            <a:endParaRPr lang="en-US" altLang="zh-CN"/>
+          </a:p>
+          <a:p>
+            <a:pPr marL="285750" indent="-285750" algn="l">
+              <a:buFont typeface="Arial" panose="020B0604020202020204" pitchFamily="34" charset="0"/>
+              <a:buChar char="•"/>
+            </a:pPr>
+            <a:r>
+              <a:rPr lang="en-US" altLang="zh-CN"/>
+              <a:t>set_protocol_type('https')</a:t>
+            </a:r>
+            <a:endParaRPr lang="en-US" altLang="zh-CN"/>
+          </a:p>
+          <a:p>
+            <a:pPr marL="285750" indent="-285750" algn="l">
+              <a:buFont typeface="Arial" panose="020B0604020202020204" pitchFamily="34" charset="0"/>
+              <a:buChar char="•"/>
+            </a:pPr>
+            <a:r>
+              <a:rPr lang="en-US" altLang="zh-CN"/>
+              <a:t>set_version('2017-05-25')</a:t>
+            </a:r>
+            <a:endParaRPr lang="en-US" altLang="zh-CN"/>
+          </a:p>
+          <a:p>
+            <a:pPr marL="285750" indent="-285750" algn="l">
+              <a:buFont typeface="Arial" panose="020B0604020202020204" pitchFamily="34" charset="0"/>
+              <a:buChar char="•"/>
+            </a:pPr>
+            <a:r>
+              <a:rPr lang="en-US" altLang="zh-CN"/>
+              <a:t>set_action_name('SendSms')</a:t>
+            </a:r>
+            <a:endParaRPr lang="en-US" altLang="zh-CN"/>
+          </a:p>
+          <a:p>
+            <a:pPr marL="285750" indent="-285750" algn="l">
+              <a:buFont typeface="Arial" panose="020B0604020202020204" pitchFamily="34" charset="0"/>
+              <a:buChar char="•"/>
+            </a:pPr>
+            <a:r>
+              <a:rPr lang="en-US" altLang="zh-CN"/>
+              <a:t>add_query_param('RegionId', 'cn-beijing')</a:t>
+            </a:r>
+            <a:endParaRPr lang="en-US" altLang="zh-CN"/>
+          </a:p>
+        </p:txBody>
+      </p:sp>
+    </p:spTree>
+    <p:custDataLst>
+      <p:tags r:id="rId1"/>
+    </p:custDataLst>
+  </p:cSld>
+  <p:clrMapOvr>
+    <a:masterClrMapping/>
+  </p:clrMapOvr>
+</p:sld>
+</file>
+
 <file path=ppt/slides/slide2.xml><?xml version="1.0" encoding="utf-8"?>
 <p:sld xmlns:a="http://schemas.openxmlformats.org/drawingml/2006/main" xmlns:r="http://schemas.openxmlformats.org/officeDocument/2006/relationships" xmlns:p="http://schemas.openxmlformats.org/presentationml/2006/main">
   <p:cSld>
@@ -4008,7 +4237,7 @@
       <p:grpSpPr/>
       <p:sp>
         <p:nvSpPr>
-          <p:cNvPr id="4" name="标题 3"/>
+          <p:cNvPr id="2" name="标题 1"/>
           <p:cNvSpPr>
             <a:spLocks noGrp="1"/>
           </p:cNvSpPr>
@@ -4021,27 +4250,112 @@
           <a:bodyPr/>
           <a:p>
             <a:r>
+              <a:rPr lang="zh-CN" altLang="en-US"/>
+              <a:t>大模型应用上架及合规备案</a:t>
+            </a:r>
+            <a:endParaRPr lang="zh-CN" altLang="en-US"/>
+          </a:p>
+        </p:txBody>
+      </p:sp>
+      <p:sp>
+        <p:nvSpPr>
+          <p:cNvPr id="3" name="内容占位符 2"/>
+          <p:cNvSpPr>
+            <a:spLocks noGrp="1"/>
+          </p:cNvSpPr>
+          <p:nvPr>
+            <p:ph idx="1"/>
+          </p:nvPr>
+        </p:nvSpPr>
+        <p:spPr>
+          <a:xfrm>
+            <a:off x="838200" y="1211580"/>
+            <a:ext cx="4998720" cy="4549140"/>
+          </a:xfrm>
+        </p:spPr>
+        <p:txBody>
+          <a:bodyPr/>
+          <a:p>
+            <a:r>
               <a:rPr lang="en-US" altLang="zh-CN"/>
-              <a:t>Python Development</a:t>
+              <a:t>References</a:t>
             </a:r>
             <a:endParaRPr lang="en-US" altLang="zh-CN"/>
           </a:p>
-        </p:txBody>
-      </p:sp>
-      <p:sp>
-        <p:nvSpPr>
-          <p:cNvPr id="5" name="文本占位符 4"/>
-          <p:cNvSpPr>
-            <a:spLocks noGrp="1"/>
-          </p:cNvSpPr>
-          <p:nvPr>
-            <p:ph type="body" idx="1"/>
-          </p:nvPr>
-        </p:nvSpPr>
-        <p:spPr/>
-        <p:txBody>
-          <a:bodyPr/>
-          <a:p>
+          <a:p>
+            <a:pPr lvl="1"/>
+            <a:r>
+              <a:rPr lang="en-US" altLang="zh-CN"/>
+              <a:t>https://help.aliyun.com/zh/model-studio/compliance-and-launch-filing-guide-for-ai-apps-powered-by-the-tongyi-model</a:t>
+            </a:r>
+            <a:endParaRPr lang="en-US" altLang="zh-CN"/>
+          </a:p>
+          <a:p>
+            <a:pPr lvl="0"/>
+            <a:r>
+              <a:rPr lang="zh-CN" altLang="en-US"/>
+              <a:t>大模型算法备案</a:t>
+            </a:r>
+            <a:r>
+              <a:rPr lang="zh-CN" altLang="en-US"/>
+              <a:t>信息</a:t>
+            </a:r>
+            <a:endParaRPr lang="zh-CN" altLang="en-US"/>
+          </a:p>
+          <a:p>
+            <a:pPr lvl="1"/>
+            <a:r>
+              <a:rPr lang="zh-CN" altLang="en-US"/>
+              <a:t>算法备案</a:t>
+            </a:r>
+            <a:r>
+              <a:rPr lang="zh-CN" altLang="en-US"/>
+              <a:t>系统</a:t>
+            </a:r>
+            <a:endParaRPr lang="zh-CN" altLang="en-US"/>
+          </a:p>
+          <a:p>
+            <a:pPr lvl="2"/>
+            <a:r>
+              <a:rPr lang="en-US" altLang="zh-CN"/>
+              <a:t>https://beian.cac.gov.cn/#/index</a:t>
+            </a:r>
+            <a:endParaRPr lang="en-US" altLang="zh-CN"/>
+          </a:p>
+          <a:p>
+            <a:pPr lvl="2"/>
+            <a:r>
+              <a:rPr lang="zh-CN" altLang="en-US"/>
+              <a:t>备案</a:t>
+            </a:r>
+            <a:r>
+              <a:rPr lang="zh-CN" altLang="en-US"/>
+              <a:t>号</a:t>
+            </a:r>
+            <a:endParaRPr lang="zh-CN" altLang="en-US"/>
+          </a:p>
+          <a:p>
+            <a:pPr lvl="3"/>
+            <a:r>
+              <a:rPr lang="zh-CN" altLang="en-US"/>
+              <a:t>千问：网信算备</a:t>
+            </a:r>
+            <a:r>
+              <a:rPr lang="en-US" altLang="zh-CN"/>
+              <a:t>330110507206401230035</a:t>
+            </a:r>
+            <a:r>
+              <a:rPr lang="zh-CN" altLang="en-US"/>
+              <a:t>号</a:t>
+            </a:r>
+            <a:endParaRPr lang="zh-CN" altLang="en-US"/>
+          </a:p>
+          <a:p>
+            <a:pPr lvl="1"/>
+            <a:r>
+              <a:rPr lang="zh-CN" altLang="en-US"/>
+              <a:t>应用主体与阿里云的合作协议</a:t>
+            </a:r>
             <a:endParaRPr lang="zh-CN" altLang="en-US"/>
           </a:p>
         </p:txBody>
@@ -4069,7 +4383,7 @@
       <p:grpSpPr/>
       <p:sp>
         <p:nvSpPr>
-          <p:cNvPr id="2" name="标题 1"/>
+          <p:cNvPr id="4" name="标题 3"/>
           <p:cNvSpPr>
             <a:spLocks noGrp="1"/>
           </p:cNvSpPr>
@@ -4083,7 +4397,7 @@
           <a:p>
             <a:r>
               <a:rPr lang="en-US" altLang="zh-CN"/>
-              <a:t>Dev Environment</a:t>
+              <a:t>Python Development</a:t>
             </a:r>
             <a:endParaRPr lang="en-US" altLang="zh-CN"/>
           </a:p>
@@ -4091,155 +4405,19 @@
       </p:sp>
       <p:sp>
         <p:nvSpPr>
-          <p:cNvPr id="3" name="内容占位符 2"/>
-          <p:cNvSpPr>
-            <a:spLocks noGrp="1"/>
-          </p:cNvSpPr>
-          <p:nvPr>
-            <p:ph idx="1"/>
+          <p:cNvPr id="5" name="文本占位符 4"/>
+          <p:cNvSpPr>
+            <a:spLocks noGrp="1"/>
+          </p:cNvSpPr>
+          <p:nvPr>
+            <p:ph type="body" idx="1"/>
           </p:nvPr>
         </p:nvSpPr>
         <p:spPr/>
         <p:txBody>
           <a:bodyPr/>
           <a:p>
-            <a:r>
-              <a:rPr lang="en-US" altLang="zh-CN"/>
-              <a:t>Aliyun Python SDK</a:t>
-            </a:r>
-            <a:endParaRPr lang="en-US" altLang="zh-CN"/>
-          </a:p>
-          <a:p>
-            <a:pPr lvl="1"/>
-            <a:r>
-              <a:rPr lang="en-US" altLang="zh-CN"/>
-              <a:t>Install</a:t>
-            </a:r>
-            <a:endParaRPr lang="en-US" altLang="zh-CN"/>
-          </a:p>
-          <a:p>
-            <a:pPr lvl="2"/>
-            <a:r>
-              <a:rPr lang="en-US" altLang="zh-CN" sz="1620">
-                <a:sym typeface="+mn-ea"/>
-              </a:rPr>
-              <a:t>pip install aliyun-python-sdk-core</a:t>
-            </a:r>
-            <a:endParaRPr lang="en-US" altLang="zh-CN" sz="1620">
-              <a:sym typeface="+mn-ea"/>
-            </a:endParaRPr>
-          </a:p>
-          <a:p>
-            <a:pPr lvl="2"/>
-            <a:r>
-              <a:rPr lang="en-US" altLang="zh-CN" sz="1620">
-                <a:sym typeface="+mn-ea"/>
-              </a:rPr>
-              <a:t>pip install aliyun-python-sdk-oss</a:t>
-            </a:r>
-            <a:endParaRPr lang="en-US" altLang="zh-CN" sz="1620">
-              <a:sym typeface="+mn-ea"/>
-            </a:endParaRPr>
-          </a:p>
-          <a:p>
-            <a:pPr lvl="2"/>
-            <a:r>
-              <a:rPr lang="en-US" altLang="zh-CN" sz="1620">
-                <a:sym typeface="+mn-ea"/>
-              </a:rPr>
-              <a:t>pip install oss2</a:t>
-            </a:r>
-            <a:endParaRPr lang="en-US" altLang="zh-CN" sz="1620">
-              <a:sym typeface="+mn-ea"/>
-            </a:endParaRPr>
-          </a:p>
-          <a:p>
-            <a:pPr lvl="2"/>
-            <a:r>
-              <a:rPr lang="en-US" altLang="zh-CN" sz="1620"/>
-              <a:t>oss-admin</a:t>
-            </a:r>
-            <a:endParaRPr lang="en-US" altLang="zh-CN" sz="1620"/>
-          </a:p>
-          <a:p>
-            <a:pPr lvl="3"/>
-            <a:r>
-              <a:rPr lang="en-US" altLang="zh-CN" sz="1620">
-                <a:sym typeface="+mn-ea"/>
-              </a:rPr>
-              <a:t>git clone https://github.com/aliyun/aliyun-openapi-python-sdk.git</a:t>
-            </a:r>
-            <a:endParaRPr lang="en-US" altLang="zh-CN" sz="1620">
-              <a:sym typeface="+mn-ea"/>
-            </a:endParaRPr>
-          </a:p>
-          <a:p>
-            <a:pPr lvl="3"/>
-            <a:r>
-              <a:rPr lang="en-US" altLang="zh-CN" sz="1620" dirty="0" smtClean="0">
-                <a:latin typeface="Arial" panose="020B0604020202020204" pitchFamily="34" charset="0"/>
-                <a:ea typeface="微软雅黑" panose="020B0503020204020204" charset="-122"/>
-                <a:sym typeface="+mn-ea"/>
-              </a:rPr>
-              <a:t>cd aliyun-python-sdk-ossadmin</a:t>
-            </a:r>
-            <a:endParaRPr lang="en-US" altLang="zh-CN" sz="1620" dirty="0" smtClean="0">
-              <a:latin typeface="Arial" panose="020B0604020202020204" pitchFamily="34" charset="0"/>
-              <a:ea typeface="微软雅黑" panose="020B0503020204020204" charset="-122"/>
-              <a:sym typeface="+mn-ea"/>
-            </a:endParaRPr>
-          </a:p>
-          <a:p>
-            <a:pPr lvl="3"/>
-            <a:r>
-              <a:rPr lang="en-US" altLang="zh-CN" sz="1620" dirty="0" smtClean="0">
-                <a:latin typeface="Arial" panose="020B0604020202020204" pitchFamily="34" charset="0"/>
-                <a:ea typeface="微软雅黑" panose="020B0503020204020204" charset="-122"/>
-                <a:sym typeface="+mn-ea"/>
-              </a:rPr>
-              <a:t>sudo python setup.py install</a:t>
-            </a:r>
-            <a:endParaRPr lang="en-US" altLang="zh-CN" sz="1620" dirty="0" smtClean="0">
-              <a:latin typeface="Arial" panose="020B0604020202020204" pitchFamily="34" charset="0"/>
-              <a:ea typeface="微软雅黑" panose="020B0503020204020204" charset="-122"/>
-              <a:sym typeface="+mn-ea"/>
-            </a:endParaRPr>
-          </a:p>
-          <a:p>
-            <a:pPr lvl="0"/>
-            <a:r>
-              <a:rPr lang="en-US" altLang="zh-CN" dirty="0" smtClean="0">
-                <a:latin typeface="Arial" panose="020B0604020202020204" pitchFamily="34" charset="0"/>
-                <a:ea typeface="微软雅黑" panose="020B0503020204020204" charset="-122"/>
-                <a:sym typeface="+mn-ea"/>
-              </a:rPr>
-              <a:t>References</a:t>
-            </a:r>
-            <a:endParaRPr lang="en-US" altLang="zh-CN" dirty="0" smtClean="0">
-              <a:latin typeface="Arial" panose="020B0604020202020204" pitchFamily="34" charset="0"/>
-              <a:ea typeface="微软雅黑" panose="020B0503020204020204" charset="-122"/>
-              <a:sym typeface="+mn-ea"/>
-            </a:endParaRPr>
-          </a:p>
-          <a:p>
-            <a:pPr lvl="1"/>
-            <a:r>
-              <a:rPr lang="en-US" altLang="zh-CN" sz="1800">
-                <a:sym typeface="+mn-ea"/>
-              </a:rPr>
-              <a:t>https://help.aliyun.com/document_detail/112147.html?spm=a2c4g.11186623.6.653.6f7650a46zI0mW</a:t>
-            </a:r>
-            <a:endParaRPr lang="en-US" altLang="zh-CN" sz="1800">
-              <a:sym typeface="+mn-ea"/>
-            </a:endParaRPr>
-          </a:p>
-          <a:p>
-            <a:pPr lvl="3"/>
-            <a:endParaRPr lang="en-US" altLang="zh-CN" sz="1620"/>
-          </a:p>
-          <a:p>
-            <a:pPr lvl="2"/>
-            <a:endParaRPr lang="en-US" altLang="zh-CN"/>
+            <a:endParaRPr lang="zh-CN" altLang="en-US"/>
           </a:p>
         </p:txBody>
       </p:sp>
@@ -4255,6 +4433,203 @@
 </file>
 
 <file path=ppt/slides/slide7.xml><?xml version="1.0" encoding="utf-8"?>
+<p:sld xmlns:a="http://schemas.openxmlformats.org/drawingml/2006/main" xmlns:r="http://schemas.openxmlformats.org/officeDocument/2006/relationships" xmlns:p="http://schemas.openxmlformats.org/presentationml/2006/main">
+  <p:cSld>
+    <p:spTree>
+      <p:nvGrpSpPr>
+        <p:cNvPr id="1" name=""/>
+        <p:cNvGrpSpPr/>
+        <p:nvPr/>
+      </p:nvGrpSpPr>
+      <p:grpSpPr/>
+      <p:sp>
+        <p:nvSpPr>
+          <p:cNvPr id="2" name="标题 1"/>
+          <p:cNvSpPr>
+            <a:spLocks noGrp="1"/>
+          </p:cNvSpPr>
+          <p:nvPr>
+            <p:ph type="title"/>
+          </p:nvPr>
+        </p:nvSpPr>
+        <p:spPr/>
+        <p:txBody>
+          <a:bodyPr/>
+          <a:p>
+            <a:r>
+              <a:rPr lang="en-US" altLang="zh-CN"/>
+              <a:t>Dev Environment</a:t>
+            </a:r>
+            <a:endParaRPr lang="en-US" altLang="zh-CN"/>
+          </a:p>
+        </p:txBody>
+      </p:sp>
+      <p:sp>
+        <p:nvSpPr>
+          <p:cNvPr id="3" name="内容占位符 2"/>
+          <p:cNvSpPr>
+            <a:spLocks noGrp="1"/>
+          </p:cNvSpPr>
+          <p:nvPr>
+            <p:ph idx="1"/>
+          </p:nvPr>
+        </p:nvSpPr>
+        <p:spPr/>
+        <p:txBody>
+          <a:bodyPr/>
+          <a:p>
+            <a:r>
+              <a:rPr lang="en-US" altLang="zh-CN"/>
+              <a:t>Aliyun Python SDK</a:t>
+            </a:r>
+            <a:endParaRPr lang="en-US" altLang="zh-CN"/>
+          </a:p>
+          <a:p>
+            <a:pPr lvl="1"/>
+            <a:r>
+              <a:rPr lang="en-US" altLang="zh-CN"/>
+              <a:t>Install</a:t>
+            </a:r>
+            <a:endParaRPr lang="en-US" altLang="zh-CN"/>
+          </a:p>
+          <a:p>
+            <a:pPr lvl="2"/>
+            <a:r>
+              <a:rPr lang="en-US" altLang="zh-CN" sz="1620">
+                <a:sym typeface="+mn-ea"/>
+              </a:rPr>
+              <a:t>pip install aliyun-python-sdk-core</a:t>
+            </a:r>
+            <a:endParaRPr lang="en-US" altLang="zh-CN" sz="1620">
+              <a:sym typeface="+mn-ea"/>
+            </a:endParaRPr>
+          </a:p>
+          <a:p>
+            <a:pPr lvl="2"/>
+            <a:r>
+              <a:rPr lang="en-US" altLang="zh-CN" sz="1620">
+                <a:sym typeface="+mn-ea"/>
+              </a:rPr>
+              <a:t>pip install aliyun-python-sdk-oss</a:t>
+            </a:r>
+            <a:endParaRPr lang="en-US" altLang="zh-CN" sz="1620">
+              <a:sym typeface="+mn-ea"/>
+            </a:endParaRPr>
+          </a:p>
+          <a:p>
+            <a:pPr lvl="2"/>
+            <a:r>
+              <a:rPr lang="en-US" altLang="zh-CN" sz="1620">
+                <a:sym typeface="+mn-ea"/>
+              </a:rPr>
+              <a:t>pip install oss2</a:t>
+            </a:r>
+            <a:endParaRPr lang="en-US" altLang="zh-CN" sz="1620">
+              <a:sym typeface="+mn-ea"/>
+            </a:endParaRPr>
+          </a:p>
+          <a:p>
+            <a:pPr lvl="2"/>
+            <a:r>
+              <a:rPr lang="en-US" altLang="zh-CN" sz="1620"/>
+              <a:t>oss-admin</a:t>
+            </a:r>
+            <a:endParaRPr lang="en-US" altLang="zh-CN" sz="1620"/>
+          </a:p>
+          <a:p>
+            <a:pPr lvl="3"/>
+            <a:r>
+              <a:rPr lang="en-US" altLang="zh-CN" sz="1620">
+                <a:sym typeface="+mn-ea"/>
+              </a:rPr>
+              <a:t>git clone https://github.com/aliyun/aliyun-openapi-python-sdk.git</a:t>
+            </a:r>
+            <a:endParaRPr lang="en-US" altLang="zh-CN" sz="1620">
+              <a:sym typeface="+mn-ea"/>
+            </a:endParaRPr>
+          </a:p>
+          <a:p>
+            <a:pPr lvl="3"/>
+            <a:r>
+              <a:rPr lang="en-US" altLang="zh-CN" sz="1620" dirty="0" smtClean="0">
+                <a:latin typeface="Arial" panose="020B0604020202020204" pitchFamily="34" charset="0"/>
+                <a:ea typeface="微软雅黑" panose="020B0503020204020204" charset="-122"/>
+                <a:sym typeface="+mn-ea"/>
+              </a:rPr>
+              <a:t>cd aliyun-python-sdk-ossadmin</a:t>
+            </a:r>
+            <a:endParaRPr lang="en-US" altLang="zh-CN" sz="1620" dirty="0" smtClean="0">
+              <a:latin typeface="Arial" panose="020B0604020202020204" pitchFamily="34" charset="0"/>
+              <a:ea typeface="微软雅黑" panose="020B0503020204020204" charset="-122"/>
+              <a:sym typeface="+mn-ea"/>
+            </a:endParaRPr>
+          </a:p>
+          <a:p>
+            <a:pPr lvl="3"/>
+            <a:r>
+              <a:rPr lang="en-US" altLang="zh-CN" sz="1620" dirty="0" smtClean="0">
+                <a:latin typeface="Arial" panose="020B0604020202020204" pitchFamily="34" charset="0"/>
+                <a:ea typeface="微软雅黑" panose="020B0503020204020204" charset="-122"/>
+                <a:sym typeface="+mn-ea"/>
+              </a:rPr>
+              <a:t>sudo python setup.py install</a:t>
+            </a:r>
+            <a:endParaRPr lang="en-US" altLang="zh-CN" sz="1620" dirty="0" smtClean="0">
+              <a:latin typeface="Arial" panose="020B0604020202020204" pitchFamily="34" charset="0"/>
+              <a:ea typeface="微软雅黑" panose="020B0503020204020204" charset="-122"/>
+              <a:sym typeface="+mn-ea"/>
+            </a:endParaRPr>
+          </a:p>
+          <a:p>
+            <a:pPr lvl="0"/>
+            <a:r>
+              <a:rPr lang="en-US" altLang="zh-CN" dirty="0" smtClean="0">
+                <a:latin typeface="Arial" panose="020B0604020202020204" pitchFamily="34" charset="0"/>
+                <a:ea typeface="微软雅黑" panose="020B0503020204020204" charset="-122"/>
+                <a:sym typeface="+mn-ea"/>
+              </a:rPr>
+              <a:t>References</a:t>
+            </a:r>
+            <a:endParaRPr lang="en-US" altLang="zh-CN" dirty="0" smtClean="0">
+              <a:latin typeface="Arial" panose="020B0604020202020204" pitchFamily="34" charset="0"/>
+              <a:ea typeface="微软雅黑" panose="020B0503020204020204" charset="-122"/>
+              <a:sym typeface="+mn-ea"/>
+            </a:endParaRPr>
+          </a:p>
+          <a:p>
+            <a:pPr lvl="1"/>
+            <a:r>
+              <a:rPr lang="en-US" altLang="zh-CN" sz="1800">
+                <a:sym typeface="+mn-ea"/>
+              </a:rPr>
+              <a:t>https://help.aliyun.com/document_detail/112147.html?spm=a2c4g.11186623.6.653.6f7650a46zI0mW</a:t>
+            </a:r>
+            <a:endParaRPr lang="en-US" altLang="zh-CN" sz="1800">
+              <a:sym typeface="+mn-ea"/>
+            </a:endParaRPr>
+          </a:p>
+          <a:p>
+            <a:pPr lvl="3"/>
+            <a:endParaRPr lang="en-US" altLang="zh-CN" sz="1620"/>
+          </a:p>
+          <a:p>
+            <a:pPr lvl="2"/>
+            <a:endParaRPr lang="en-US" altLang="zh-CN"/>
+          </a:p>
+        </p:txBody>
+      </p:sp>
+    </p:spTree>
+    <p:custDataLst>
+      <p:tags r:id="rId1"/>
+    </p:custDataLst>
+  </p:cSld>
+  <p:clrMapOvr>
+    <a:masterClrMapping/>
+  </p:clrMapOvr>
+</p:sld>
+</file>
+
+<file path=ppt/slides/slide8.xml><?xml version="1.0" encoding="utf-8"?>
 <p:sld xmlns:a="http://schemas.openxmlformats.org/drawingml/2006/main" xmlns:r="http://schemas.openxmlformats.org/officeDocument/2006/relationships" xmlns:p="http://schemas.openxmlformats.org/presentationml/2006/main">
   <p:cSld>
     <p:spTree>
@@ -4692,7 +5067,7 @@
 </p:sld>
 </file>
 
-<file path=ppt/slides/slide8.xml><?xml version="1.0" encoding="utf-8"?>
+<file path=ppt/slides/slide9.xml><?xml version="1.0" encoding="utf-8"?>
 <p:sld xmlns:a="http://schemas.openxmlformats.org/drawingml/2006/main" xmlns:r="http://schemas.openxmlformats.org/officeDocument/2006/relationships" xmlns:p="http://schemas.openxmlformats.org/presentationml/2006/main">
   <p:cSld>
     <p:spTree>
@@ -5141,234 +5516,6 @@
               <a:t>response = self._client.do_action(request)</a:t>
             </a:r>
             <a:endParaRPr lang="zh-CN" altLang="en-US" sz="1400"/>
-          </a:p>
-        </p:txBody>
-      </p:sp>
-    </p:spTree>
-    <p:custDataLst>
-      <p:tags r:id="rId1"/>
-    </p:custDataLst>
-  </p:cSld>
-  <p:clrMapOvr>
-    <a:masterClrMapping/>
-  </p:clrMapOvr>
-</p:sld>
-</file>
-
-<file path=ppt/slides/slide9.xml><?xml version="1.0" encoding="utf-8"?>
-<p:sld xmlns:a="http://schemas.openxmlformats.org/drawingml/2006/main" xmlns:r="http://schemas.openxmlformats.org/officeDocument/2006/relationships" xmlns:p="http://schemas.openxmlformats.org/presentationml/2006/main">
-  <p:cSld>
-    <p:spTree>
-      <p:nvGrpSpPr>
-        <p:cNvPr id="1" name=""/>
-        <p:cNvGrpSpPr/>
-        <p:nvPr/>
-      </p:nvGrpSpPr>
-      <p:grpSpPr/>
-      <p:sp>
-        <p:nvSpPr>
-          <p:cNvPr id="2" name="标题 1"/>
-          <p:cNvSpPr>
-            <a:spLocks noGrp="1"/>
-          </p:cNvSpPr>
-          <p:nvPr>
-            <p:ph type="title"/>
-          </p:nvPr>
-        </p:nvSpPr>
-        <p:spPr/>
-        <p:txBody>
-          <a:bodyPr/>
-          <a:p>
-            <a:r>
-              <a:rPr lang="en-US" altLang="zh-CN"/>
-              <a:t>Classes</a:t>
-            </a:r>
-            <a:endParaRPr lang="en-US" altLang="zh-CN"/>
-          </a:p>
-        </p:txBody>
-      </p:sp>
-      <p:sp>
-        <p:nvSpPr>
-          <p:cNvPr id="8" name="圆角矩形 7"/>
-          <p:cNvSpPr/>
-          <p:nvPr/>
-        </p:nvSpPr>
-        <p:spPr>
-          <a:xfrm>
-            <a:off x="950595" y="1593215"/>
-            <a:ext cx="5022850" cy="1388110"/>
-          </a:xfrm>
-          <a:prstGeom prst="roundRect">
-            <a:avLst/>
-          </a:prstGeom>
-        </p:spPr>
-        <p:style>
-          <a:lnRef idx="2">
-            <a:schemeClr val="accent1">
-              <a:shade val="50000"/>
-            </a:schemeClr>
-          </a:lnRef>
-          <a:fillRef idx="1">
-            <a:schemeClr val="accent1"/>
-          </a:fillRef>
-          <a:effectRef idx="0">
-            <a:schemeClr val="accent1"/>
-          </a:effectRef>
-          <a:fontRef idx="minor">
-            <a:schemeClr val="lt1"/>
-          </a:fontRef>
-        </p:style>
-        <p:txBody>
-          <a:bodyPr rtlCol="0" anchor="t" anchorCtr="0"/>
-          <a:p>
-            <a:pPr algn="ctr"/>
-            <a:r>
-              <a:rPr lang="en-US" altLang="zh-CN"/>
-              <a:t>ACSClient</a:t>
-            </a:r>
-            <a:endParaRPr lang="en-US" altLang="zh-CN"/>
-          </a:p>
-          <a:p>
-            <a:pPr marL="285750" indent="-285750" algn="l">
-              <a:buFont typeface="Arial" panose="020B0604020202020204" pitchFamily="34" charset="0"/>
-              <a:buChar char="•"/>
-            </a:pPr>
-            <a:r>
-              <a:rPr lang="en-US" altLang="zh-CN"/>
-              <a:t>ACSClient('accessKeyId', 'accessSecret', 'cn-beijing')</a:t>
-            </a:r>
-            <a:endParaRPr lang="en-US" altLang="zh-CN"/>
-          </a:p>
-          <a:p>
-            <a:pPr marL="285750" indent="-285750" algn="l">
-              <a:buFont typeface="Arial" panose="020B0604020202020204" pitchFamily="34" charset="0"/>
-              <a:buChar char="•"/>
-            </a:pPr>
-            <a:r>
-              <a:rPr lang="en-US" altLang="zh-CN"/>
-              <a:t>do_action(request)	// return response</a:t>
-            </a:r>
-            <a:endParaRPr lang="en-US" altLang="zh-CN"/>
-          </a:p>
-        </p:txBody>
-      </p:sp>
-      <p:sp>
-        <p:nvSpPr>
-          <p:cNvPr id="6" name="圆角矩形 5"/>
-          <p:cNvSpPr/>
-          <p:nvPr/>
-        </p:nvSpPr>
-        <p:spPr>
-          <a:xfrm>
-            <a:off x="6188710" y="1593215"/>
-            <a:ext cx="5165090" cy="2692400"/>
-          </a:xfrm>
-          <a:prstGeom prst="roundRect">
-            <a:avLst/>
-          </a:prstGeom>
-        </p:spPr>
-        <p:style>
-          <a:lnRef idx="2">
-            <a:schemeClr val="accent1">
-              <a:shade val="50000"/>
-            </a:schemeClr>
-          </a:lnRef>
-          <a:fillRef idx="1">
-            <a:schemeClr val="accent1"/>
-          </a:fillRef>
-          <a:effectRef idx="0">
-            <a:schemeClr val="accent1"/>
-          </a:effectRef>
-          <a:fontRef idx="minor">
-            <a:schemeClr val="lt1"/>
-          </a:fontRef>
-        </p:style>
-        <p:txBody>
-          <a:bodyPr rtlCol="0" anchor="t" anchorCtr="0"/>
-          <a:p>
-            <a:pPr algn="ctr"/>
-            <a:r>
-              <a:rPr lang="en-US" altLang="zh-CN"/>
-              <a:t>CommonRequest</a:t>
-            </a:r>
-            <a:endParaRPr lang="en-US" altLang="zh-CN"/>
-          </a:p>
-          <a:p>
-            <a:pPr marL="285750" indent="-285750" algn="l">
-              <a:buFont typeface="Arial" panose="020B0604020202020204" pitchFamily="34" charset="0"/>
-              <a:buChar char="•"/>
-            </a:pPr>
-            <a:r>
-              <a:rPr lang="en-US" altLang="zh-CN"/>
-              <a:t>set_accept_format('json')</a:t>
-            </a:r>
-            <a:endParaRPr lang="en-US" altLang="zh-CN"/>
-          </a:p>
-          <a:p>
-            <a:pPr marL="285750" indent="-285750" algn="l">
-              <a:buFont typeface="Arial" panose="020B0604020202020204" pitchFamily="34" charset="0"/>
-              <a:buChar char="•"/>
-            </a:pPr>
-            <a:r>
-              <a:rPr lang="en-US" altLang="zh-CN"/>
-              <a:t>set_domain('dysmsapi.aliyuncs.com')</a:t>
-            </a:r>
-            <a:endParaRPr lang="en-US" altLang="zh-CN"/>
-          </a:p>
-          <a:p>
-            <a:pPr marL="285750" indent="-285750" algn="l">
-              <a:buFont typeface="Arial" panose="020B0604020202020204" pitchFamily="34" charset="0"/>
-              <a:buChar char="•"/>
-            </a:pPr>
-            <a:r>
-              <a:rPr lang="en-US" altLang="zh-CN"/>
-              <a:t>set_method('POST')</a:t>
-            </a:r>
-            <a:endParaRPr lang="en-US" altLang="zh-CN"/>
-          </a:p>
-          <a:p>
-            <a:pPr marL="285750" indent="-285750" algn="l">
-              <a:buFont typeface="Arial" panose="020B0604020202020204" pitchFamily="34" charset="0"/>
-              <a:buChar char="•"/>
-            </a:pPr>
-            <a:r>
-              <a:rPr lang="en-US" altLang="zh-CN"/>
-              <a:t>set_protocol_type('https')</a:t>
-            </a:r>
-            <a:endParaRPr lang="en-US" altLang="zh-CN"/>
-          </a:p>
-          <a:p>
-            <a:pPr marL="285750" indent="-285750" algn="l">
-              <a:buFont typeface="Arial" panose="020B0604020202020204" pitchFamily="34" charset="0"/>
-              <a:buChar char="•"/>
-            </a:pPr>
-            <a:r>
-              <a:rPr lang="en-US" altLang="zh-CN"/>
-              <a:t>set_version('2017-05-25')</a:t>
-            </a:r>
-            <a:endParaRPr lang="en-US" altLang="zh-CN"/>
-          </a:p>
-          <a:p>
-            <a:pPr marL="285750" indent="-285750" algn="l">
-              <a:buFont typeface="Arial" panose="020B0604020202020204" pitchFamily="34" charset="0"/>
-              <a:buChar char="•"/>
-            </a:pPr>
-            <a:r>
-              <a:rPr lang="en-US" altLang="zh-CN"/>
-              <a:t>set_action_name('SendSms')</a:t>
-            </a:r>
-            <a:endParaRPr lang="en-US" altLang="zh-CN"/>
-          </a:p>
-          <a:p>
-            <a:pPr marL="285750" indent="-285750" algn="l">
-              <a:buFont typeface="Arial" panose="020B0604020202020204" pitchFamily="34" charset="0"/>
-              <a:buChar char="•"/>
-            </a:pPr>
-            <a:r>
-              <a:rPr lang="en-US" altLang="zh-CN"/>
-              <a:t>add_query_param('RegionId', 'cn-beijing')</a:t>
-            </a:r>
-            <a:endParaRPr lang="en-US" altLang="zh-CN"/>
           </a:p>
         </p:txBody>
       </p:sp>
@@ -5424,6 +5571,14 @@
 </file>
 
 <file path=ppt/tags/tag14.xml><?xml version="1.0" encoding="utf-8"?>
+<p:tagLst xmlns:p="http://schemas.openxmlformats.org/presentationml/2006/main">
+  <p:tag name="KSO_WM_BEAUTIFY_FLAG" val="#wm#"/>
+  <p:tag name="KSO_WM_TEMPLATE_CATEGORY" val="custom"/>
+  <p:tag name="KSO_WM_TEMPLATE_INDEX" val="160402"/>
+</p:tagLst>
+</file>
+
+<file path=ppt/tags/tag15.xml><?xml version="1.0" encoding="utf-8"?>
 <p:tagLst xmlns:p="http://schemas.openxmlformats.org/presentationml/2006/main">
   <p:tag name="KSO_WM_BEAUTIFY_FLAG" val="#wm#"/>
   <p:tag name="KSO_WM_TEMPLATE_CATEGORY" val="custom"/>
